--- a/E-commerce Customer Segmentation & Analysis.pptx
+++ b/E-commerce Customer Segmentation & Analysis.pptx
@@ -271,7 +271,7 @@
           <a:p>
             <a:fld id="{CE6CA38B-7C7D-414A-A625-30F767BF4309}" type="datetimeFigureOut">
               <a:rPr lang="en-IN" smtClean="0"/>
-              <a:t>01-09-2025</a:t>
+              <a:t>28-05-2026</a:t>
             </a:fld>
             <a:endParaRPr lang="en-IN"/>
           </a:p>
@@ -471,7 +471,7 @@
           <a:p>
             <a:fld id="{CE6CA38B-7C7D-414A-A625-30F767BF4309}" type="datetimeFigureOut">
               <a:rPr lang="en-IN" smtClean="0"/>
-              <a:t>01-09-2025</a:t>
+              <a:t>28-05-2026</a:t>
             </a:fld>
             <a:endParaRPr lang="en-IN"/>
           </a:p>
@@ -681,7 +681,7 @@
           <a:p>
             <a:fld id="{CE6CA38B-7C7D-414A-A625-30F767BF4309}" type="datetimeFigureOut">
               <a:rPr lang="en-IN" smtClean="0"/>
-              <a:t>01-09-2025</a:t>
+              <a:t>28-05-2026</a:t>
             </a:fld>
             <a:endParaRPr lang="en-IN"/>
           </a:p>
@@ -881,7 +881,7 @@
           <a:p>
             <a:fld id="{CE6CA38B-7C7D-414A-A625-30F767BF4309}" type="datetimeFigureOut">
               <a:rPr lang="en-IN" smtClean="0"/>
-              <a:t>01-09-2025</a:t>
+              <a:t>28-05-2026</a:t>
             </a:fld>
             <a:endParaRPr lang="en-IN"/>
           </a:p>
@@ -1157,7 +1157,7 @@
           <a:p>
             <a:fld id="{CE6CA38B-7C7D-414A-A625-30F767BF4309}" type="datetimeFigureOut">
               <a:rPr lang="en-IN" smtClean="0"/>
-              <a:t>01-09-2025</a:t>
+              <a:t>28-05-2026</a:t>
             </a:fld>
             <a:endParaRPr lang="en-IN"/>
           </a:p>
@@ -1425,7 +1425,7 @@
           <a:p>
             <a:fld id="{CE6CA38B-7C7D-414A-A625-30F767BF4309}" type="datetimeFigureOut">
               <a:rPr lang="en-IN" smtClean="0"/>
-              <a:t>01-09-2025</a:t>
+              <a:t>28-05-2026</a:t>
             </a:fld>
             <a:endParaRPr lang="en-IN"/>
           </a:p>
@@ -1840,7 +1840,7 @@
           <a:p>
             <a:fld id="{CE6CA38B-7C7D-414A-A625-30F767BF4309}" type="datetimeFigureOut">
               <a:rPr lang="en-IN" smtClean="0"/>
-              <a:t>01-09-2025</a:t>
+              <a:t>28-05-2026</a:t>
             </a:fld>
             <a:endParaRPr lang="en-IN"/>
           </a:p>
@@ -1982,7 +1982,7 @@
           <a:p>
             <a:fld id="{CE6CA38B-7C7D-414A-A625-30F767BF4309}" type="datetimeFigureOut">
               <a:rPr lang="en-IN" smtClean="0"/>
-              <a:t>01-09-2025</a:t>
+              <a:t>28-05-2026</a:t>
             </a:fld>
             <a:endParaRPr lang="en-IN"/>
           </a:p>
@@ -2095,7 +2095,7 @@
           <a:p>
             <a:fld id="{CE6CA38B-7C7D-414A-A625-30F767BF4309}" type="datetimeFigureOut">
               <a:rPr lang="en-IN" smtClean="0"/>
-              <a:t>01-09-2025</a:t>
+              <a:t>28-05-2026</a:t>
             </a:fld>
             <a:endParaRPr lang="en-IN"/>
           </a:p>
@@ -2408,7 +2408,7 @@
           <a:p>
             <a:fld id="{CE6CA38B-7C7D-414A-A625-30F767BF4309}" type="datetimeFigureOut">
               <a:rPr lang="en-IN" smtClean="0"/>
-              <a:t>01-09-2025</a:t>
+              <a:t>28-05-2026</a:t>
             </a:fld>
             <a:endParaRPr lang="en-IN"/>
           </a:p>
@@ -2697,7 +2697,7 @@
           <a:p>
             <a:fld id="{CE6CA38B-7C7D-414A-A625-30F767BF4309}" type="datetimeFigureOut">
               <a:rPr lang="en-IN" smtClean="0"/>
-              <a:t>01-09-2025</a:t>
+              <a:t>28-05-2026</a:t>
             </a:fld>
             <a:endParaRPr lang="en-IN"/>
           </a:p>
@@ -2949,7 +2949,7 @@
           <a:p>
             <a:fld id="{CE6CA38B-7C7D-414A-A625-30F767BF4309}" type="datetimeFigureOut">
               <a:rPr lang="en-IN" smtClean="0"/>
-              <a:t>01-09-2025</a:t>
+              <a:t>28-05-2026</a:t>
             </a:fld>
             <a:endParaRPr lang="en-IN"/>
           </a:p>
@@ -4512,10 +4512,10 @@
           <p:nvPr/>
         </p:nvPicPr>
         <p:blipFill>
-          <a:blip r:embed="rId2">
+          <a:blip>
             <a:extLst>
               <a:ext uri="{96DAC541-7B7A-43D3-8B79-37D633B846F1}">
-                <asvg:svgBlip xmlns:asvg="http://schemas.microsoft.com/office/drawing/2016/SVG/main" r:embed="rId3"/>
+                <asvg:svgBlip xmlns:asvg="http://schemas.microsoft.com/office/drawing/2016/SVG/main" r:embed="rId2"/>
               </a:ext>
             </a:extLst>
           </a:blip>
@@ -4547,10 +4547,10 @@
           <p:nvPr/>
         </p:nvPicPr>
         <p:blipFill>
-          <a:blip r:embed="rId4">
+          <a:blip>
             <a:extLst>
               <a:ext uri="{96DAC541-7B7A-43D3-8B79-37D633B846F1}">
-                <asvg:svgBlip xmlns:asvg="http://schemas.microsoft.com/office/drawing/2016/SVG/main" r:embed="rId5"/>
+                <asvg:svgBlip xmlns:asvg="http://schemas.microsoft.com/office/drawing/2016/SVG/main" r:embed="rId3"/>
               </a:ext>
             </a:extLst>
           </a:blip>
@@ -4583,10 +4583,10 @@
           <p:nvPr/>
         </p:nvPicPr>
         <p:blipFill>
-          <a:blip r:embed="rId6">
+          <a:blip>
             <a:extLst>
               <a:ext uri="{96DAC541-7B7A-43D3-8B79-37D633B846F1}">
-                <asvg:svgBlip xmlns:asvg="http://schemas.microsoft.com/office/drawing/2016/SVG/main" r:embed="rId7"/>
+                <asvg:svgBlip xmlns:asvg="http://schemas.microsoft.com/office/drawing/2016/SVG/main" r:embed="rId4"/>
               </a:ext>
             </a:extLst>
           </a:blip>
@@ -4618,7 +4618,7 @@
           <p:nvPr/>
         </p:nvPicPr>
         <p:blipFill>
-          <a:blip r:embed="rId8">
+          <a:blip r:embed="rId5">
             <a:extLst>
               <a:ext uri="{28A0092B-C50C-407E-A947-70E740481C1C}">
                 <a14:useLocalDpi xmlns:a14="http://schemas.microsoft.com/office/drawing/2010/main" val="0"/>
@@ -4654,7 +4654,7 @@
           <p:nvPr/>
         </p:nvPicPr>
         <p:blipFill>
-          <a:blip r:embed="rId9">
+          <a:blip r:embed="rId6">
             <a:extLst>
               <a:ext uri="{28A0092B-C50C-407E-A947-70E740481C1C}">
                 <a14:useLocalDpi xmlns:a14="http://schemas.microsoft.com/office/drawing/2010/main" val="0"/>
@@ -5623,10 +5623,10 @@
           <p:nvPr/>
         </p:nvPicPr>
         <p:blipFill>
-          <a:blip r:embed="rId2">
+          <a:blip>
             <a:extLst>
               <a:ext uri="{96DAC541-7B7A-43D3-8B79-37D633B846F1}">
-                <asvg:svgBlip xmlns:asvg="http://schemas.microsoft.com/office/drawing/2016/SVG/main" r:embed="rId3"/>
+                <asvg:svgBlip xmlns:asvg="http://schemas.microsoft.com/office/drawing/2016/SVG/main" r:embed="rId2"/>
               </a:ext>
             </a:extLst>
           </a:blip>
@@ -14681,37 +14681,6 @@
           <a:chExt cx="0" cy="0"/>
         </a:xfrm>
       </p:grpSpPr>
-      <p:pic>
-        <p:nvPicPr>
-          <p:cNvPr id="3" name="Picture 2">
-            <a:extLst>
-              <a:ext uri="{FF2B5EF4-FFF2-40B4-BE49-F238E27FC236}">
-                <a16:creationId xmlns:a16="http://schemas.microsoft.com/office/drawing/2014/main" id="{9C2B73B1-4F64-D343-7268-24583FED665D}"/>
-              </a:ext>
-            </a:extLst>
-          </p:cNvPr>
-          <p:cNvPicPr>
-            <a:picLocks noChangeAspect="1"/>
-          </p:cNvPicPr>
-          <p:nvPr/>
-        </p:nvPicPr>
-        <p:blipFill>
-          <a:blip r:embed="rId2"/>
-          <a:srcRect l="3124" t="22362" r="30756" b="11758"/>
-          <a:stretch>
-            <a:fillRect/>
-          </a:stretch>
-        </p:blipFill>
-        <p:spPr>
-          <a:xfrm>
-            <a:off x="0" y="1710813"/>
-            <a:ext cx="8613058" cy="5147187"/>
-          </a:xfrm>
-          <a:prstGeom prst="rect">
-            <a:avLst/>
-          </a:prstGeom>
-        </p:spPr>
-      </p:pic>
       <p:sp>
         <p:nvSpPr>
           <p:cNvPr id="4" name="Title 1">
@@ -15339,6 +15308,37 @@
           </p:txBody>
         </p:sp>
       </p:grpSp>
+      <p:pic>
+        <p:nvPicPr>
+          <p:cNvPr id="9" name="Picture 8">
+            <a:extLst>
+              <a:ext uri="{FF2B5EF4-FFF2-40B4-BE49-F238E27FC236}">
+                <a16:creationId xmlns:a16="http://schemas.microsoft.com/office/drawing/2014/main" id="{D31769BA-9B06-8B14-5F2C-C3D1F354311D}"/>
+              </a:ext>
+            </a:extLst>
+          </p:cNvPr>
+          <p:cNvPicPr>
+            <a:picLocks noChangeAspect="1"/>
+          </p:cNvPicPr>
+          <p:nvPr/>
+        </p:nvPicPr>
+        <p:blipFill>
+          <a:blip r:embed="rId2"/>
+          <a:srcRect l="3090" t="22514" r="30337" b="11069"/>
+          <a:stretch>
+            <a:fillRect/>
+          </a:stretch>
+        </p:blipFill>
+        <p:spPr>
+          <a:xfrm>
+            <a:off x="0" y="1578543"/>
+            <a:ext cx="8633326" cy="5279457"/>
+          </a:xfrm>
+          <a:prstGeom prst="rect">
+            <a:avLst/>
+          </a:prstGeom>
+        </p:spPr>
+      </p:pic>
     </p:spTree>
     <p:extLst>
       <p:ext uri="{BB962C8B-B14F-4D97-AF65-F5344CB8AC3E}">
@@ -17722,10 +17722,10 @@
           <p:nvPr/>
         </p:nvPicPr>
         <p:blipFill>
-          <a:blip r:embed="rId2">
+          <a:blip>
             <a:extLst>
               <a:ext uri="{96DAC541-7B7A-43D3-8B79-37D633B846F1}">
-                <asvg:svgBlip xmlns:asvg="http://schemas.microsoft.com/office/drawing/2016/SVG/main" r:embed="rId3"/>
+                <asvg:svgBlip xmlns:asvg="http://schemas.microsoft.com/office/drawing/2016/SVG/main" r:embed="rId2"/>
               </a:ext>
             </a:extLst>
           </a:blip>
@@ -17757,10 +17757,10 @@
           <p:nvPr/>
         </p:nvPicPr>
         <p:blipFill>
-          <a:blip r:embed="rId4">
+          <a:blip>
             <a:extLst>
               <a:ext uri="{96DAC541-7B7A-43D3-8B79-37D633B846F1}">
-                <asvg:svgBlip xmlns:asvg="http://schemas.microsoft.com/office/drawing/2016/SVG/main" r:embed="rId5"/>
+                <asvg:svgBlip xmlns:asvg="http://schemas.microsoft.com/office/drawing/2016/SVG/main" r:embed="rId3"/>
               </a:ext>
             </a:extLst>
           </a:blip>
@@ -17793,10 +17793,10 @@
           <p:nvPr/>
         </p:nvPicPr>
         <p:blipFill>
-          <a:blip r:embed="rId6">
+          <a:blip>
             <a:extLst>
               <a:ext uri="{96DAC541-7B7A-43D3-8B79-37D633B846F1}">
-                <asvg:svgBlip xmlns:asvg="http://schemas.microsoft.com/office/drawing/2016/SVG/main" r:embed="rId7"/>
+                <asvg:svgBlip xmlns:asvg="http://schemas.microsoft.com/office/drawing/2016/SVG/main" r:embed="rId4"/>
               </a:ext>
             </a:extLst>
           </a:blip>
@@ -17828,7 +17828,7 @@
           <p:nvPr/>
         </p:nvPicPr>
         <p:blipFill>
-          <a:blip r:embed="rId8">
+          <a:blip r:embed="rId5">
             <a:extLst>
               <a:ext uri="{28A0092B-C50C-407E-A947-70E740481C1C}">
                 <a14:useLocalDpi xmlns:a14="http://schemas.microsoft.com/office/drawing/2010/main" val="0"/>
@@ -17864,7 +17864,7 @@
           <p:nvPr/>
         </p:nvPicPr>
         <p:blipFill>
-          <a:blip r:embed="rId9">
+          <a:blip r:embed="rId6">
             <a:extLst>
               <a:ext uri="{28A0092B-C50C-407E-A947-70E740481C1C}">
                 <a14:useLocalDpi xmlns:a14="http://schemas.microsoft.com/office/drawing/2010/main" val="0"/>
